--- a/PPT/DeepLearning08-MLP.pptx
+++ b/PPT/DeepLearning08-MLP.pptx
@@ -18,8 +18,8 @@
     <p:sldId id="327" r:id="rId6"/>
     <p:sldId id="308" r:id="rId7"/>
     <p:sldId id="328" r:id="rId8"/>
-    <p:sldId id="310" r:id="rId9"/>
-    <p:sldId id="335" r:id="rId10"/>
+    <p:sldId id="339" r:id="rId9"/>
+    <p:sldId id="310" r:id="rId10"/>
     <p:sldId id="313" r:id="rId11"/>
     <p:sldId id="330" r:id="rId12"/>
     <p:sldId id="314" r:id="rId13"/>
@@ -9097,6 +9097,119 @@
       </p:grpSpPr>
       <p:sp>
         <p:nvSpPr>
+          <p:cNvPr id="2" name="Titre 1">
+            <a:extLst>
+              <a:ext uri="{FF2B5EF4-FFF2-40B4-BE49-F238E27FC236}">
+                <a16:creationId xmlns:a16="http://schemas.microsoft.com/office/drawing/2014/main" id="{3F56DD26-BA7B-9FD5-BABA-7110440E0E9F}"/>
+              </a:ext>
+            </a:extLst>
+          </p:cNvPr>
+          <p:cNvSpPr>
+            <a:spLocks noGrp="1"/>
+          </p:cNvSpPr>
+          <p:nvPr>
+            <p:ph type="title"/>
+          </p:nvPr>
+        </p:nvSpPr>
+        <p:spPr/>
+        <p:txBody>
+          <a:bodyPr/>
+          <a:lstStyle/>
+          <a:p>
+            <a:r>
+              <a:rPr lang="fr-FR" dirty="0"/>
+              <a:t>Les fonctions d'activation</a:t>
+            </a:r>
+          </a:p>
+        </p:txBody>
+      </p:sp>
+      <p:sp>
+        <p:nvSpPr>
+          <p:cNvPr id="3" name="Espace réservé du contenu 2">
+            <a:extLst>
+              <a:ext uri="{FF2B5EF4-FFF2-40B4-BE49-F238E27FC236}">
+                <a16:creationId xmlns:a16="http://schemas.microsoft.com/office/drawing/2014/main" id="{7009746D-1980-5B33-F973-8BC8335AA8E1}"/>
+              </a:ext>
+            </a:extLst>
+          </p:cNvPr>
+          <p:cNvSpPr>
+            <a:spLocks noGrp="1"/>
+          </p:cNvSpPr>
+          <p:nvPr>
+            <p:ph idx="1"/>
+          </p:nvPr>
+        </p:nvSpPr>
+        <p:spPr/>
+        <p:txBody>
+          <a:bodyPr/>
+          <a:lstStyle/>
+          <a:p>
+            <a:endParaRPr lang="fr-FR"/>
+          </a:p>
+        </p:txBody>
+      </p:sp>
+      <p:pic>
+        <p:nvPicPr>
+          <p:cNvPr id="5" name="Image 4">
+            <a:extLst>
+              <a:ext uri="{FF2B5EF4-FFF2-40B4-BE49-F238E27FC236}">
+                <a16:creationId xmlns:a16="http://schemas.microsoft.com/office/drawing/2014/main" id="{522382E4-572A-7BF2-77C4-7B84B5A199F1}"/>
+              </a:ext>
+            </a:extLst>
+          </p:cNvPr>
+          <p:cNvPicPr>
+            <a:picLocks noChangeAspect="1"/>
+          </p:cNvPicPr>
+          <p:nvPr/>
+        </p:nvPicPr>
+        <p:blipFill>
+          <a:blip r:embed="rId2"/>
+          <a:stretch>
+            <a:fillRect/>
+          </a:stretch>
+        </p:blipFill>
+        <p:spPr>
+          <a:xfrm>
+            <a:off x="1430445" y="2492896"/>
+            <a:ext cx="6264183" cy="2651990"/>
+          </a:xfrm>
+          <a:prstGeom prst="rect">
+            <a:avLst/>
+          </a:prstGeom>
+        </p:spPr>
+      </p:pic>
+    </p:spTree>
+    <p:extLst>
+      <p:ext uri="{BB962C8B-B14F-4D97-AF65-F5344CB8AC3E}">
+        <p14:creationId xmlns:p14="http://schemas.microsoft.com/office/powerpoint/2010/main" val="3614466827"/>
+      </p:ext>
+    </p:extLst>
+  </p:cSld>
+  <p:clrMapOvr>
+    <a:masterClrMapping/>
+  </p:clrMapOvr>
+</p:sld>
+</file>
+
+<file path=ppt/slides/slide9.xml><?xml version="1.0" encoding="utf-8"?>
+<p:sld xmlns:a="http://schemas.openxmlformats.org/drawingml/2006/main" xmlns:r="http://schemas.openxmlformats.org/officeDocument/2006/relationships" xmlns:p="http://schemas.openxmlformats.org/presentationml/2006/main">
+  <p:cSld>
+    <p:spTree>
+      <p:nvGrpSpPr>
+        <p:cNvPr id="1" name=""/>
+        <p:cNvGrpSpPr/>
+        <p:nvPr/>
+      </p:nvGrpSpPr>
+      <p:grpSpPr>
+        <a:xfrm>
+          <a:off x="0" y="0"/>
+          <a:ext cx="0" cy="0"/>
+          <a:chOff x="0" y="0"/>
+          <a:chExt cx="0" cy="0"/>
+        </a:xfrm>
+      </p:grpSpPr>
+      <p:sp>
+        <p:nvSpPr>
           <p:cNvPr id="2" name="Titre 1"/>
           <p:cNvSpPr>
             <a:spLocks noGrp="1"/>
@@ -9215,133 +9328,6 @@
     <p:extLst>
       <p:ext uri="{BB962C8B-B14F-4D97-AF65-F5344CB8AC3E}">
         <p14:creationId xmlns:p14="http://schemas.microsoft.com/office/powerpoint/2010/main" val="956616338"/>
-      </p:ext>
-    </p:extLst>
-  </p:cSld>
-  <p:clrMapOvr>
-    <a:masterClrMapping/>
-  </p:clrMapOvr>
-</p:sld>
-</file>
-
-<file path=ppt/slides/slide9.xml><?xml version="1.0" encoding="utf-8"?>
-<p:sld xmlns:a="http://schemas.openxmlformats.org/drawingml/2006/main" xmlns:r="http://schemas.openxmlformats.org/officeDocument/2006/relationships" xmlns:p="http://schemas.openxmlformats.org/presentationml/2006/main">
-  <p:cSld>
-    <p:spTree>
-      <p:nvGrpSpPr>
-        <p:cNvPr id="1" name=""/>
-        <p:cNvGrpSpPr/>
-        <p:nvPr/>
-      </p:nvGrpSpPr>
-      <p:grpSpPr>
-        <a:xfrm>
-          <a:off x="0" y="0"/>
-          <a:ext cx="0" cy="0"/>
-          <a:chOff x="0" y="0"/>
-          <a:chExt cx="0" cy="0"/>
-        </a:xfrm>
-      </p:grpSpPr>
-      <p:sp>
-        <p:nvSpPr>
-          <p:cNvPr id="2" name="Titre 1">
-            <a:extLst>
-              <a:ext uri="{FF2B5EF4-FFF2-40B4-BE49-F238E27FC236}">
-                <a16:creationId xmlns:a16="http://schemas.microsoft.com/office/drawing/2014/main" id="{8F70621C-8133-4AF8-9F36-D6FE8A0E5231}"/>
-              </a:ext>
-            </a:extLst>
-          </p:cNvPr>
-          <p:cNvSpPr>
-            <a:spLocks noGrp="1"/>
-          </p:cNvSpPr>
-          <p:nvPr>
-            <p:ph type="title"/>
-          </p:nvPr>
-        </p:nvSpPr>
-        <p:spPr/>
-        <p:txBody>
-          <a:bodyPr/>
-          <a:lstStyle/>
-          <a:p>
-            <a:endParaRPr lang="fr-FR"/>
-          </a:p>
-        </p:txBody>
-      </p:sp>
-      <p:sp>
-        <p:nvSpPr>
-          <p:cNvPr id="3" name="Espace réservé du contenu 2">
-            <a:extLst>
-              <a:ext uri="{FF2B5EF4-FFF2-40B4-BE49-F238E27FC236}">
-                <a16:creationId xmlns:a16="http://schemas.microsoft.com/office/drawing/2014/main" id="{0906E2D9-7FC5-4ADF-989D-3CBC34B19002}"/>
-              </a:ext>
-            </a:extLst>
-          </p:cNvPr>
-          <p:cNvSpPr>
-            <a:spLocks noGrp="1"/>
-          </p:cNvSpPr>
-          <p:nvPr>
-            <p:ph idx="1"/>
-          </p:nvPr>
-        </p:nvSpPr>
-        <p:spPr/>
-        <p:txBody>
-          <a:bodyPr/>
-          <a:lstStyle/>
-          <a:p>
-            <a:endParaRPr lang="fr-FR"/>
-          </a:p>
-        </p:txBody>
-      </p:sp>
-      <p:cxnSp>
-        <p:nvCxnSpPr>
-          <p:cNvPr id="5" name="Connecteur : en angle 4">
-            <a:extLst>
-              <a:ext uri="{FF2B5EF4-FFF2-40B4-BE49-F238E27FC236}">
-                <a16:creationId xmlns:a16="http://schemas.microsoft.com/office/drawing/2014/main" id="{3303298C-DFEE-4E8C-9806-5BC6013AC13E}"/>
-              </a:ext>
-            </a:extLst>
-          </p:cNvPr>
-          <p:cNvCxnSpPr>
-            <a:cxnSpLocks/>
-          </p:cNvCxnSpPr>
-          <p:nvPr/>
-        </p:nvCxnSpPr>
-        <p:spPr bwMode="auto">
-          <a:xfrm rot="10800000" flipV="1">
-            <a:off x="2483768" y="2348880"/>
-            <a:ext cx="3744416" cy="3312368"/>
-          </a:xfrm>
-          <a:prstGeom prst="bentConnector3">
-            <a:avLst>
-              <a:gd name="adj1" fmla="val 50000"/>
-            </a:avLst>
-          </a:prstGeom>
-          <a:gradFill rotWithShape="0">
-            <a:gsLst>
-              <a:gs pos="0">
-                <a:schemeClr val="accent1"/>
-              </a:gs>
-              <a:gs pos="100000">
-                <a:schemeClr val="bg1"/>
-              </a:gs>
-            </a:gsLst>
-            <a:lin ang="5400000" scaled="1"/>
-          </a:gradFill>
-          <a:ln w="9525" cap="flat" cmpd="sng" algn="ctr">
-            <a:solidFill>
-              <a:schemeClr val="tx1"/>
-            </a:solidFill>
-            <a:prstDash val="solid"/>
-            <a:round/>
-            <a:headEnd type="none" w="med" len="med"/>
-            <a:tailEnd type="none" w="med" len="med"/>
-          </a:ln>
-          <a:effectLst/>
-        </p:spPr>
-      </p:cxnSp>
-    </p:spTree>
-    <p:extLst>
-      <p:ext uri="{BB962C8B-B14F-4D97-AF65-F5344CB8AC3E}">
-        <p14:creationId xmlns:p14="http://schemas.microsoft.com/office/powerpoint/2010/main" val="60975076"/>
       </p:ext>
     </p:extLst>
   </p:cSld>

--- a/PPT/DeepLearning08-MLP.pptx
+++ b/PPT/DeepLearning08-MLP.pptx
@@ -5,10 +5,10 @@
     <p:sldMasterId id="2147483653" r:id="rId1"/>
   </p:sldMasterIdLst>
   <p:notesMasterIdLst>
-    <p:notesMasterId r:id="rId34"/>
+    <p:notesMasterId r:id="rId33"/>
   </p:notesMasterIdLst>
   <p:handoutMasterIdLst>
-    <p:handoutMasterId r:id="rId35"/>
+    <p:handoutMasterId r:id="rId34"/>
   </p:handoutMasterIdLst>
   <p:sldIdLst>
     <p:sldId id="264" r:id="rId2"/>
@@ -30,19 +30,18 @@
     <p:sldId id="319" r:id="rId18"/>
     <p:sldId id="337" r:id="rId19"/>
     <p:sldId id="336" r:id="rId20"/>
-    <p:sldId id="338" r:id="rId21"/>
-    <p:sldId id="329" r:id="rId22"/>
-    <p:sldId id="320" r:id="rId23"/>
-    <p:sldId id="334" r:id="rId24"/>
-    <p:sldId id="321" r:id="rId25"/>
-    <p:sldId id="323" r:id="rId26"/>
-    <p:sldId id="324" r:id="rId27"/>
-    <p:sldId id="326" r:id="rId28"/>
-    <p:sldId id="322" r:id="rId29"/>
-    <p:sldId id="318" r:id="rId30"/>
-    <p:sldId id="331" r:id="rId31"/>
-    <p:sldId id="333" r:id="rId32"/>
-    <p:sldId id="332" r:id="rId33"/>
+    <p:sldId id="329" r:id="rId21"/>
+    <p:sldId id="320" r:id="rId22"/>
+    <p:sldId id="334" r:id="rId23"/>
+    <p:sldId id="321" r:id="rId24"/>
+    <p:sldId id="323" r:id="rId25"/>
+    <p:sldId id="324" r:id="rId26"/>
+    <p:sldId id="326" r:id="rId27"/>
+    <p:sldId id="322" r:id="rId28"/>
+    <p:sldId id="318" r:id="rId29"/>
+    <p:sldId id="331" r:id="rId30"/>
+    <p:sldId id="333" r:id="rId31"/>
+    <p:sldId id="332" r:id="rId32"/>
   </p:sldIdLst>
   <p:sldSz cx="9144000" cy="6858000" type="screen4x3"/>
   <p:notesSz cx="6648450" cy="9782175"/>
@@ -914,6 +913,130 @@
 </file>
 
 <file path=ppt/notesSlides/notesSlide1.xml><?xml version="1.0" encoding="utf-8"?>
+<p:notes xmlns:a="http://schemas.openxmlformats.org/drawingml/2006/main" xmlns:r="http://schemas.openxmlformats.org/officeDocument/2006/relationships" xmlns:p="http://schemas.openxmlformats.org/presentationml/2006/main">
+  <p:cSld>
+    <p:spTree>
+      <p:nvGrpSpPr>
+        <p:cNvPr id="1" name=""/>
+        <p:cNvGrpSpPr/>
+        <p:nvPr/>
+      </p:nvGrpSpPr>
+      <p:grpSpPr>
+        <a:xfrm>
+          <a:off x="0" y="0"/>
+          <a:ext cx="0" cy="0"/>
+          <a:chOff x="0" y="0"/>
+          <a:chExt cx="0" cy="0"/>
+        </a:xfrm>
+      </p:grpSpPr>
+      <p:sp>
+        <p:nvSpPr>
+          <p:cNvPr id="2" name="Espace réservé de l'image des diapositives 1"/>
+          <p:cNvSpPr>
+            <a:spLocks noGrp="1" noRot="1" noChangeAspect="1"/>
+          </p:cNvSpPr>
+          <p:nvPr>
+            <p:ph type="sldImg"/>
+          </p:nvPr>
+        </p:nvSpPr>
+        <p:spPr>
+          <a:xfrm>
+            <a:off x="877888" y="733425"/>
+            <a:ext cx="4892675" cy="3670300"/>
+          </a:xfrm>
+        </p:spPr>
+      </p:sp>
+      <p:sp>
+        <p:nvSpPr>
+          <p:cNvPr id="3" name="Espace réservé des notes 2"/>
+          <p:cNvSpPr>
+            <a:spLocks noGrp="1"/>
+          </p:cNvSpPr>
+          <p:nvPr>
+            <p:ph type="body" idx="1"/>
+          </p:nvPr>
+        </p:nvSpPr>
+        <p:spPr/>
+        <p:txBody>
+          <a:bodyPr/>
+          <a:lstStyle/>
+          <a:p>
+            <a:endParaRPr lang="fr-FR" dirty="0"/>
+          </a:p>
+        </p:txBody>
+      </p:sp>
+      <p:sp>
+        <p:nvSpPr>
+          <p:cNvPr id="4" name="Espace réservé du pied de page 3"/>
+          <p:cNvSpPr>
+            <a:spLocks noGrp="1"/>
+          </p:cNvSpPr>
+          <p:nvPr>
+            <p:ph type="ftr" sz="quarter" idx="4"/>
+          </p:nvPr>
+        </p:nvSpPr>
+        <p:spPr/>
+        <p:txBody>
+          <a:bodyPr/>
+          <a:lstStyle/>
+          <a:p>
+            <a:pPr>
+              <a:defRPr/>
+            </a:pPr>
+            <a:r>
+              <a:rPr lang="fr-FR"/>
+              <a:t>© HANDSHAKE - Philippe MASINA</a:t>
+            </a:r>
+          </a:p>
+        </p:txBody>
+      </p:sp>
+      <p:sp>
+        <p:nvSpPr>
+          <p:cNvPr id="5" name="Espace réservé du numéro de diapositive 4"/>
+          <p:cNvSpPr>
+            <a:spLocks noGrp="1"/>
+          </p:cNvSpPr>
+          <p:nvPr>
+            <p:ph type="sldNum" sz="quarter" idx="5"/>
+          </p:nvPr>
+        </p:nvSpPr>
+        <p:spPr/>
+        <p:txBody>
+          <a:bodyPr/>
+          <a:lstStyle/>
+          <a:p>
+            <a:pPr>
+              <a:defRPr/>
+            </a:pPr>
+            <a:r>
+              <a:rPr lang="fr-FR"/>
+              <a:t>I-</a:t>
+            </a:r>
+            <a:fld id="{88B410AF-14E7-4D87-8C8E-6E377E0C2388}" type="slidenum">
+              <a:rPr lang="fr-FR" smtClean="0"/>
+              <a:pPr>
+                <a:defRPr/>
+              </a:pPr>
+              <a:t>9</a:t>
+            </a:fld>
+            <a:endParaRPr lang="fr-FR"/>
+          </a:p>
+        </p:txBody>
+      </p:sp>
+    </p:spTree>
+    <p:extLst>
+      <p:ext uri="{BB962C8B-B14F-4D97-AF65-F5344CB8AC3E}">
+        <p14:creationId xmlns:p14="http://schemas.microsoft.com/office/powerpoint/2010/main" val="2124510562"/>
+      </p:ext>
+    </p:extLst>
+  </p:cSld>
+  <p:clrMapOvr>
+    <a:masterClrMapping/>
+  </p:clrMapOvr>
+</p:notes>
+</file>
+
+<file path=ppt/notesSlides/notesSlide2.xml><?xml version="1.0" encoding="utf-8"?>
 <p:notes xmlns:a="http://schemas.openxmlformats.org/drawingml/2006/main" xmlns:r="http://schemas.openxmlformats.org/officeDocument/2006/relationships" xmlns:p="http://schemas.openxmlformats.org/presentationml/2006/main">
   <p:cSld>
     <p:spTree>
@@ -6354,86 +6477,6 @@
       </p:grpSpPr>
       <p:sp>
         <p:nvSpPr>
-          <p:cNvPr id="2" name="Titre 1">
-            <a:extLst>
-              <a:ext uri="{FF2B5EF4-FFF2-40B4-BE49-F238E27FC236}">
-                <a16:creationId xmlns:a16="http://schemas.microsoft.com/office/drawing/2014/main" id="{FEC65580-602C-57D6-D797-0862DEC259DE}"/>
-              </a:ext>
-            </a:extLst>
-          </p:cNvPr>
-          <p:cNvSpPr>
-            <a:spLocks noGrp="1"/>
-          </p:cNvSpPr>
-          <p:nvPr>
-            <p:ph type="title"/>
-          </p:nvPr>
-        </p:nvSpPr>
-        <p:spPr/>
-        <p:txBody>
-          <a:bodyPr/>
-          <a:lstStyle/>
-          <a:p>
-            <a:endParaRPr lang="fr-FR"/>
-          </a:p>
-        </p:txBody>
-      </p:sp>
-      <p:sp>
-        <p:nvSpPr>
-          <p:cNvPr id="3" name="Espace réservé du contenu 2">
-            <a:extLst>
-              <a:ext uri="{FF2B5EF4-FFF2-40B4-BE49-F238E27FC236}">
-                <a16:creationId xmlns:a16="http://schemas.microsoft.com/office/drawing/2014/main" id="{E36A9D8C-5713-4DAC-1616-E39DA76C06E8}"/>
-              </a:ext>
-            </a:extLst>
-          </p:cNvPr>
-          <p:cNvSpPr>
-            <a:spLocks noGrp="1"/>
-          </p:cNvSpPr>
-          <p:nvPr>
-            <p:ph idx="1"/>
-          </p:nvPr>
-        </p:nvSpPr>
-        <p:spPr/>
-        <p:txBody>
-          <a:bodyPr/>
-          <a:lstStyle/>
-          <a:p>
-            <a:endParaRPr lang="fr-FR"/>
-          </a:p>
-        </p:txBody>
-      </p:sp>
-    </p:spTree>
-    <p:extLst>
-      <p:ext uri="{BB962C8B-B14F-4D97-AF65-F5344CB8AC3E}">
-        <p14:creationId xmlns:p14="http://schemas.microsoft.com/office/powerpoint/2010/main" val="3399132013"/>
-      </p:ext>
-    </p:extLst>
-  </p:cSld>
-  <p:clrMapOvr>
-    <a:masterClrMapping/>
-  </p:clrMapOvr>
-</p:sld>
-</file>
-
-<file path=ppt/slides/slide21.xml><?xml version="1.0" encoding="utf-8"?>
-<p:sld xmlns:a="http://schemas.openxmlformats.org/drawingml/2006/main" xmlns:r="http://schemas.openxmlformats.org/officeDocument/2006/relationships" xmlns:p="http://schemas.openxmlformats.org/presentationml/2006/main">
-  <p:cSld>
-    <p:spTree>
-      <p:nvGrpSpPr>
-        <p:cNvPr id="1" name=""/>
-        <p:cNvGrpSpPr/>
-        <p:nvPr/>
-      </p:nvGrpSpPr>
-      <p:grpSpPr>
-        <a:xfrm>
-          <a:off x="0" y="0"/>
-          <a:ext cx="0" cy="0"/>
-          <a:chOff x="0" y="0"/>
-          <a:chExt cx="0" cy="0"/>
-        </a:xfrm>
-      </p:grpSpPr>
-      <p:sp>
-        <p:nvSpPr>
           <p:cNvPr id="2" name="Titre 1"/>
           <p:cNvSpPr>
             <a:spLocks noGrp="1"/>
@@ -6515,7 +6558,7 @@
 </p:sld>
 </file>
 
-<file path=ppt/slides/slide22.xml><?xml version="1.0" encoding="utf-8"?>
+<file path=ppt/slides/slide21.xml><?xml version="1.0" encoding="utf-8"?>
 <p:sld xmlns:a="http://schemas.openxmlformats.org/drawingml/2006/main" xmlns:r="http://schemas.openxmlformats.org/officeDocument/2006/relationships" xmlns:p="http://schemas.openxmlformats.org/presentationml/2006/main">
   <p:cSld>
     <p:spTree>
@@ -6636,7 +6679,7 @@
 </p:sld>
 </file>
 
-<file path=ppt/slides/slide23.xml><?xml version="1.0" encoding="utf-8"?>
+<file path=ppt/slides/slide22.xml><?xml version="1.0" encoding="utf-8"?>
 <p:sld xmlns:a="http://schemas.openxmlformats.org/drawingml/2006/main" xmlns:r="http://schemas.openxmlformats.org/officeDocument/2006/relationships" xmlns:p="http://schemas.openxmlformats.org/presentationml/2006/main">
   <p:cSld>
     <p:spTree>
@@ -6800,7 +6843,7 @@
 </p:sld>
 </file>
 
-<file path=ppt/slides/slide24.xml><?xml version="1.0" encoding="utf-8"?>
+<file path=ppt/slides/slide23.xml><?xml version="1.0" encoding="utf-8"?>
 <p:sld xmlns:a="http://schemas.openxmlformats.org/drawingml/2006/main" xmlns:r="http://schemas.openxmlformats.org/officeDocument/2006/relationships" xmlns:p="http://schemas.openxmlformats.org/presentationml/2006/main">
   <p:cSld>
     <p:spTree>
@@ -6949,7 +6992,7 @@
 </p:sld>
 </file>
 
-<file path=ppt/slides/slide25.xml><?xml version="1.0" encoding="utf-8"?>
+<file path=ppt/slides/slide24.xml><?xml version="1.0" encoding="utf-8"?>
 <p:sld xmlns:a="http://schemas.openxmlformats.org/drawingml/2006/main" xmlns:r="http://schemas.openxmlformats.org/officeDocument/2006/relationships" xmlns:p="http://schemas.openxmlformats.org/presentationml/2006/main">
   <p:cSld>
     <p:spTree>
@@ -7112,7 +7155,7 @@
 </p:sld>
 </file>
 
-<file path=ppt/slides/slide26.xml><?xml version="1.0" encoding="utf-8"?>
+<file path=ppt/slides/slide25.xml><?xml version="1.0" encoding="utf-8"?>
 <p:sld xmlns:a="http://schemas.openxmlformats.org/drawingml/2006/main" xmlns:r="http://schemas.openxmlformats.org/officeDocument/2006/relationships" xmlns:p="http://schemas.openxmlformats.org/presentationml/2006/main">
   <p:cSld>
     <p:spTree>
@@ -7283,7 +7326,7 @@
 </p:sld>
 </file>
 
-<file path=ppt/slides/slide27.xml><?xml version="1.0" encoding="utf-8"?>
+<file path=ppt/slides/slide26.xml><?xml version="1.0" encoding="utf-8"?>
 <p:sld xmlns:a="http://schemas.openxmlformats.org/drawingml/2006/main" xmlns:r="http://schemas.openxmlformats.org/officeDocument/2006/relationships" xmlns:p="http://schemas.openxmlformats.org/presentationml/2006/main">
   <p:cSld>
     <p:spTree>
@@ -7379,7 +7422,7 @@
 </p:sld>
 </file>
 
-<file path=ppt/slides/slide28.xml><?xml version="1.0" encoding="utf-8"?>
+<file path=ppt/slides/slide27.xml><?xml version="1.0" encoding="utf-8"?>
 <p:sld xmlns:a="http://schemas.openxmlformats.org/drawingml/2006/main" xmlns:r="http://schemas.openxmlformats.org/officeDocument/2006/relationships" xmlns:p="http://schemas.openxmlformats.org/presentationml/2006/main">
   <p:cSld>
     <p:spTree>
@@ -7572,7 +7615,7 @@
 </p:sld>
 </file>
 
-<file path=ppt/slides/slide29.xml><?xml version="1.0" encoding="utf-8"?>
+<file path=ppt/slides/slide28.xml><?xml version="1.0" encoding="utf-8"?>
 <p:sld xmlns:a="http://schemas.openxmlformats.org/drawingml/2006/main" xmlns:r="http://schemas.openxmlformats.org/officeDocument/2006/relationships" xmlns:p="http://schemas.openxmlformats.org/presentationml/2006/main">
   <p:cSld>
     <p:spTree>
@@ -7678,6 +7721,140 @@
     <p:extLst>
       <p:ext uri="{BB962C8B-B14F-4D97-AF65-F5344CB8AC3E}">
         <p14:creationId xmlns:p14="http://schemas.microsoft.com/office/powerpoint/2010/main" val="651947342"/>
+      </p:ext>
+    </p:extLst>
+  </p:cSld>
+  <p:clrMapOvr>
+    <a:masterClrMapping/>
+  </p:clrMapOvr>
+</p:sld>
+</file>
+
+<file path=ppt/slides/slide29.xml><?xml version="1.0" encoding="utf-8"?>
+<p:sld xmlns:a="http://schemas.openxmlformats.org/drawingml/2006/main" xmlns:r="http://schemas.openxmlformats.org/officeDocument/2006/relationships" xmlns:p="http://schemas.openxmlformats.org/presentationml/2006/main">
+  <p:cSld>
+    <p:spTree>
+      <p:nvGrpSpPr>
+        <p:cNvPr id="1" name=""/>
+        <p:cNvGrpSpPr/>
+        <p:nvPr/>
+      </p:nvGrpSpPr>
+      <p:grpSpPr>
+        <a:xfrm>
+          <a:off x="0" y="0"/>
+          <a:ext cx="0" cy="0"/>
+          <a:chOff x="0" y="0"/>
+          <a:chExt cx="0" cy="0"/>
+        </a:xfrm>
+      </p:grpSpPr>
+      <p:sp>
+        <p:nvSpPr>
+          <p:cNvPr id="2" name="Titre 1"/>
+          <p:cNvSpPr>
+            <a:spLocks noGrp="1"/>
+          </p:cNvSpPr>
+          <p:nvPr>
+            <p:ph type="title"/>
+          </p:nvPr>
+        </p:nvSpPr>
+        <p:spPr/>
+        <p:txBody>
+          <a:bodyPr/>
+          <a:lstStyle/>
+          <a:p>
+            <a:r>
+              <a:rPr lang="fr-FR" dirty="0"/>
+              <a:t>Coût</a:t>
+            </a:r>
+          </a:p>
+        </p:txBody>
+      </p:sp>
+      <p:sp>
+        <p:nvSpPr>
+          <p:cNvPr id="3" name="Espace réservé du contenu 2"/>
+          <p:cNvSpPr>
+            <a:spLocks noGrp="1"/>
+          </p:cNvSpPr>
+          <p:nvPr>
+            <p:ph idx="1"/>
+          </p:nvPr>
+        </p:nvSpPr>
+        <p:spPr>
+          <a:xfrm>
+            <a:off x="179513" y="1412776"/>
+            <a:ext cx="7056784" cy="5040560"/>
+          </a:xfrm>
+        </p:spPr>
+        <p:txBody>
+          <a:bodyPr/>
+          <a:lstStyle/>
+          <a:p>
+            <a:r>
+              <a:rPr lang="fr-FR" dirty="0"/>
+              <a:t>Très couteux</a:t>
+            </a:r>
+          </a:p>
+          <a:p>
+            <a:pPr lvl="1"/>
+            <a:r>
+              <a:rPr lang="fr-FR" dirty="0"/>
+              <a:t>Mais donne de très bon résultats</a:t>
+            </a:r>
+          </a:p>
+          <a:p>
+            <a:pPr lvl="1"/>
+            <a:r>
+              <a:rPr lang="fr-FR" dirty="0"/>
+              <a:t>Maitrise l’addition sur 4 bits avec 145 neurones et 100 itérations</a:t>
+            </a:r>
+          </a:p>
+        </p:txBody>
+      </p:sp>
+      <p:pic>
+        <p:nvPicPr>
+          <p:cNvPr id="3074" name="Picture 2" descr="../_images/multilayerperceptron_network.png"/>
+          <p:cNvPicPr>
+            <a:picLocks noChangeAspect="1" noChangeArrowheads="1"/>
+          </p:cNvPicPr>
+          <p:nvPr/>
+        </p:nvPicPr>
+        <p:blipFill>
+          <a:blip r:embed="rId2" cstate="print">
+            <a:extLst>
+              <a:ext uri="{28A0092B-C50C-407E-A947-70E740481C1C}">
+                <a14:useLocalDpi xmlns:a14="http://schemas.microsoft.com/office/drawing/2010/main" val="0"/>
+              </a:ext>
+            </a:extLst>
+          </a:blip>
+          <a:srcRect/>
+          <a:stretch>
+            <a:fillRect/>
+          </a:stretch>
+        </p:blipFill>
+        <p:spPr bwMode="auto">
+          <a:xfrm>
+            <a:off x="6863081" y="2132856"/>
+            <a:ext cx="2088232" cy="2269585"/>
+          </a:xfrm>
+          <a:prstGeom prst="rect">
+            <a:avLst/>
+          </a:prstGeom>
+          <a:noFill/>
+          <a:extLst>
+            <a:ext uri="{909E8E84-426E-40DD-AFC4-6F175D3DCCD1}">
+              <a14:hiddenFill xmlns:a14="http://schemas.microsoft.com/office/drawing/2010/main">
+                <a:solidFill>
+                  <a:srgbClr val="FFFFFF"/>
+                </a:solidFill>
+              </a14:hiddenFill>
+            </a:ext>
+          </a:extLst>
+        </p:spPr>
+      </p:pic>
+    </p:spTree>
+    <p:extLst>
+      <p:ext uri="{BB962C8B-B14F-4D97-AF65-F5344CB8AC3E}">
+        <p14:creationId xmlns:p14="http://schemas.microsoft.com/office/powerpoint/2010/main" val="1268887621"/>
       </p:ext>
     </p:extLst>
   </p:cSld>
@@ -7839,140 +8016,6 @@
           <a:p>
             <a:r>
               <a:rPr lang="fr-FR" dirty="0"/>
-              <a:t>Coût</a:t>
-            </a:r>
-          </a:p>
-        </p:txBody>
-      </p:sp>
-      <p:sp>
-        <p:nvSpPr>
-          <p:cNvPr id="3" name="Espace réservé du contenu 2"/>
-          <p:cNvSpPr>
-            <a:spLocks noGrp="1"/>
-          </p:cNvSpPr>
-          <p:nvPr>
-            <p:ph idx="1"/>
-          </p:nvPr>
-        </p:nvSpPr>
-        <p:spPr>
-          <a:xfrm>
-            <a:off x="179513" y="1412776"/>
-            <a:ext cx="7056784" cy="5040560"/>
-          </a:xfrm>
-        </p:spPr>
-        <p:txBody>
-          <a:bodyPr/>
-          <a:lstStyle/>
-          <a:p>
-            <a:r>
-              <a:rPr lang="fr-FR" dirty="0"/>
-              <a:t>Très couteux</a:t>
-            </a:r>
-          </a:p>
-          <a:p>
-            <a:pPr lvl="1"/>
-            <a:r>
-              <a:rPr lang="fr-FR" dirty="0"/>
-              <a:t>Mais donne de très bon résultats</a:t>
-            </a:r>
-          </a:p>
-          <a:p>
-            <a:pPr lvl="1"/>
-            <a:r>
-              <a:rPr lang="fr-FR" dirty="0"/>
-              <a:t>Maitrise l’addition sur 4 bits avec 145 neurones et 100 itérations</a:t>
-            </a:r>
-          </a:p>
-        </p:txBody>
-      </p:sp>
-      <p:pic>
-        <p:nvPicPr>
-          <p:cNvPr id="3074" name="Picture 2" descr="../_images/multilayerperceptron_network.png"/>
-          <p:cNvPicPr>
-            <a:picLocks noChangeAspect="1" noChangeArrowheads="1"/>
-          </p:cNvPicPr>
-          <p:nvPr/>
-        </p:nvPicPr>
-        <p:blipFill>
-          <a:blip r:embed="rId2" cstate="print">
-            <a:extLst>
-              <a:ext uri="{28A0092B-C50C-407E-A947-70E740481C1C}">
-                <a14:useLocalDpi xmlns:a14="http://schemas.microsoft.com/office/drawing/2010/main" val="0"/>
-              </a:ext>
-            </a:extLst>
-          </a:blip>
-          <a:srcRect/>
-          <a:stretch>
-            <a:fillRect/>
-          </a:stretch>
-        </p:blipFill>
-        <p:spPr bwMode="auto">
-          <a:xfrm>
-            <a:off x="6863081" y="2132856"/>
-            <a:ext cx="2088232" cy="2269585"/>
-          </a:xfrm>
-          <a:prstGeom prst="rect">
-            <a:avLst/>
-          </a:prstGeom>
-          <a:noFill/>
-          <a:extLst>
-            <a:ext uri="{909E8E84-426E-40DD-AFC4-6F175D3DCCD1}">
-              <a14:hiddenFill xmlns:a14="http://schemas.microsoft.com/office/drawing/2010/main">
-                <a:solidFill>
-                  <a:srgbClr val="FFFFFF"/>
-                </a:solidFill>
-              </a14:hiddenFill>
-            </a:ext>
-          </a:extLst>
-        </p:spPr>
-      </p:pic>
-    </p:spTree>
-    <p:extLst>
-      <p:ext uri="{BB962C8B-B14F-4D97-AF65-F5344CB8AC3E}">
-        <p14:creationId xmlns:p14="http://schemas.microsoft.com/office/powerpoint/2010/main" val="1268887621"/>
-      </p:ext>
-    </p:extLst>
-  </p:cSld>
-  <p:clrMapOvr>
-    <a:masterClrMapping/>
-  </p:clrMapOvr>
-</p:sld>
-</file>
-
-<file path=ppt/slides/slide31.xml><?xml version="1.0" encoding="utf-8"?>
-<p:sld xmlns:a="http://schemas.openxmlformats.org/drawingml/2006/main" xmlns:r="http://schemas.openxmlformats.org/officeDocument/2006/relationships" xmlns:p="http://schemas.openxmlformats.org/presentationml/2006/main">
-  <p:cSld>
-    <p:spTree>
-      <p:nvGrpSpPr>
-        <p:cNvPr id="1" name=""/>
-        <p:cNvGrpSpPr/>
-        <p:nvPr/>
-      </p:nvGrpSpPr>
-      <p:grpSpPr>
-        <a:xfrm>
-          <a:off x="0" y="0"/>
-          <a:ext cx="0" cy="0"/>
-          <a:chOff x="0" y="0"/>
-          <a:chExt cx="0" cy="0"/>
-        </a:xfrm>
-      </p:grpSpPr>
-      <p:sp>
-        <p:nvSpPr>
-          <p:cNvPr id="2" name="Titre 1"/>
-          <p:cNvSpPr>
-            <a:spLocks noGrp="1"/>
-          </p:cNvSpPr>
-          <p:nvPr>
-            <p:ph type="title"/>
-          </p:nvPr>
-        </p:nvSpPr>
-        <p:spPr/>
-        <p:txBody>
-          <a:bodyPr/>
-          <a:lstStyle/>
-          <a:p>
-            <a:r>
-              <a:rPr lang="fr-FR" dirty="0"/>
               <a:t>Asymétrie</a:t>
             </a:r>
           </a:p>
@@ -8039,7 +8082,7 @@
 </p:sld>
 </file>
 
-<file path=ppt/slides/slide32.xml><?xml version="1.0" encoding="utf-8"?>
+<file path=ppt/slides/slide31.xml><?xml version="1.0" encoding="utf-8"?>
 <p:sld xmlns:a="http://schemas.openxmlformats.org/drawingml/2006/main" xmlns:r="http://schemas.openxmlformats.org/officeDocument/2006/relationships" xmlns:p="http://schemas.openxmlformats.org/presentationml/2006/main">
   <p:cSld>
     <p:spTree>
@@ -9309,7 +9352,7 @@
           <p:nvPr/>
         </p:nvPicPr>
         <p:blipFill>
-          <a:blip r:embed="rId2"/>
+          <a:blip r:embed="rId3"/>
           <a:stretch>
             <a:fillRect/>
           </a:stretch>
